--- a/Data_Scaling.pptx
+++ b/Data_Scaling.pptx
@@ -5,11 +5,10 @@
     <p:sldMasterId id="2147483648" r:id="rId1"/>
   </p:sldMasterIdLst>
   <p:notesMasterIdLst>
-    <p:notesMasterId r:id="rId4"/>
+    <p:notesMasterId r:id="rId3"/>
   </p:notesMasterIdLst>
   <p:sldIdLst>
     <p:sldId id="334" r:id="rId2"/>
-    <p:sldId id="333" r:id="rId3"/>
   </p:sldIdLst>
   <p:sldSz cx="12192000" cy="6858000"/>
   <p:notesSz cx="6858000" cy="9144000"/>
@@ -4349,1119 +4348,6 @@
     <p:extLst>
       <p:ext uri="{BB962C8B-B14F-4D97-AF65-F5344CB8AC3E}">
         <p14:creationId xmlns:p14="http://schemas.microsoft.com/office/powerpoint/2010/main" val="410025639"/>
-      </p:ext>
-    </p:extLst>
-  </p:cSld>
-  <p:clrMapOvr>
-    <a:masterClrMapping/>
-  </p:clrMapOvr>
-</p:sld>
-</file>
-
-<file path=ppt/slides/slide2.xml><?xml version="1.0" encoding="utf-8"?>
-<p:sld xmlns:a="http://schemas.openxmlformats.org/drawingml/2006/main" xmlns:r="http://schemas.openxmlformats.org/officeDocument/2006/relationships" xmlns:p="http://schemas.openxmlformats.org/presentationml/2006/main">
-  <p:cSld>
-    <p:spTree>
-      <p:nvGrpSpPr>
-        <p:cNvPr id="1" name=""/>
-        <p:cNvGrpSpPr/>
-        <p:nvPr/>
-      </p:nvGrpSpPr>
-      <p:grpSpPr>
-        <a:xfrm>
-          <a:off x="0" y="0"/>
-          <a:ext cx="0" cy="0"/>
-          <a:chOff x="0" y="0"/>
-          <a:chExt cx="0" cy="0"/>
-        </a:xfrm>
-      </p:grpSpPr>
-      <p:sp>
-        <p:nvSpPr>
-          <p:cNvPr id="4" name="TextBox 3">
-            <a:extLst>
-              <a:ext uri="{FF2B5EF4-FFF2-40B4-BE49-F238E27FC236}">
-                <a16:creationId xmlns:a16="http://schemas.microsoft.com/office/drawing/2014/main" id="{D1E58F78-8F27-2D4A-BD36-154CD23B3E50}"/>
-              </a:ext>
-            </a:extLst>
-          </p:cNvPr>
-          <p:cNvSpPr txBox="1"/>
-          <p:nvPr/>
-        </p:nvSpPr>
-        <p:spPr>
-          <a:xfrm>
-            <a:off x="0" y="76402"/>
-            <a:ext cx="5082639" cy="646331"/>
-          </a:xfrm>
-          <a:prstGeom prst="rect">
-            <a:avLst/>
-          </a:prstGeom>
-          <a:noFill/>
-        </p:spPr>
-        <p:txBody>
-          <a:bodyPr wrap="square" rtlCol="0">
-            <a:spAutoFit/>
-          </a:bodyPr>
-          <a:lstStyle/>
-          <a:p>
-            <a:pPr algn="ctr"/>
-            <a:r>
-              <a:rPr lang="en-US" sz="3600" b="1" dirty="0"/>
-              <a:t>OLAP Cube – Complexity</a:t>
-            </a:r>
-          </a:p>
-        </p:txBody>
-      </p:sp>
-      <p:sp>
-        <p:nvSpPr>
-          <p:cNvPr id="2" name="TextBox 1">
-            <a:extLst>
-              <a:ext uri="{FF2B5EF4-FFF2-40B4-BE49-F238E27FC236}">
-                <a16:creationId xmlns:a16="http://schemas.microsoft.com/office/drawing/2014/main" id="{8556E077-CBBF-8B4A-AFD9-7FF186E983BF}"/>
-              </a:ext>
-            </a:extLst>
-          </p:cNvPr>
-          <p:cNvSpPr txBox="1"/>
-          <p:nvPr/>
-        </p:nvSpPr>
-        <p:spPr>
-          <a:xfrm>
-            <a:off x="361825" y="909341"/>
-            <a:ext cx="5082639" cy="369332"/>
-          </a:xfrm>
-          <a:prstGeom prst="rect">
-            <a:avLst/>
-          </a:prstGeom>
-          <a:noFill/>
-        </p:spPr>
-        <p:txBody>
-          <a:bodyPr wrap="square" rtlCol="0">
-            <a:spAutoFit/>
-          </a:bodyPr>
-          <a:lstStyle/>
-          <a:p>
-            <a:r>
-              <a:rPr lang="en-US" dirty="0"/>
-              <a:t>Kimball vs </a:t>
-            </a:r>
-            <a:r>
-              <a:rPr lang="en-US" dirty="0" err="1"/>
-              <a:t>Inmon</a:t>
-            </a:r>
-            <a:r>
-              <a:rPr lang="en-US" dirty="0"/>
-              <a:t> vs Data Vault frameworks</a:t>
-            </a:r>
-          </a:p>
-        </p:txBody>
-      </p:sp>
-      <p:pic>
-        <p:nvPicPr>
-          <p:cNvPr id="1026" name="Picture 2">
-            <a:extLst>
-              <a:ext uri="{FF2B5EF4-FFF2-40B4-BE49-F238E27FC236}">
-                <a16:creationId xmlns:a16="http://schemas.microsoft.com/office/drawing/2014/main" id="{61A3A473-C1E6-BB4B-B45D-0E62BB53D0BE}"/>
-              </a:ext>
-            </a:extLst>
-          </p:cNvPr>
-          <p:cNvPicPr>
-            <a:picLocks noChangeAspect="1" noChangeArrowheads="1"/>
-          </p:cNvPicPr>
-          <p:nvPr/>
-        </p:nvPicPr>
-        <p:blipFill rotWithShape="1">
-          <a:blip r:embed="rId2" cstate="email">
-            <a:extLst>
-              <a:ext uri="{28A0092B-C50C-407E-A947-70E740481C1C}">
-                <a14:useLocalDpi xmlns:a14="http://schemas.microsoft.com/office/drawing/2010/main"/>
-              </a:ext>
-            </a:extLst>
-          </a:blip>
-          <a:srcRect l="2429" t="3835" r="1620" b="5740"/>
-          <a:stretch/>
-        </p:blipFill>
-        <p:spPr bwMode="auto">
-          <a:xfrm>
-            <a:off x="6452919" y="720437"/>
-            <a:ext cx="5628904" cy="2648197"/>
-          </a:xfrm>
-          <a:prstGeom prst="rect">
-            <a:avLst/>
-          </a:prstGeom>
-          <a:noFill/>
-          <a:extLst>
-            <a:ext uri="{909E8E84-426E-40DD-AFC4-6F175D3DCCD1}">
-              <a14:hiddenFill xmlns:a14="http://schemas.microsoft.com/office/drawing/2010/main">
-                <a:solidFill>
-                  <a:srgbClr val="FFFFFF"/>
-                </a:solidFill>
-              </a14:hiddenFill>
-            </a:ext>
-          </a:extLst>
-        </p:spPr>
-      </p:pic>
-      <p:pic>
-        <p:nvPicPr>
-          <p:cNvPr id="1028" name="Picture 4">
-            <a:extLst>
-              <a:ext uri="{FF2B5EF4-FFF2-40B4-BE49-F238E27FC236}">
-                <a16:creationId xmlns:a16="http://schemas.microsoft.com/office/drawing/2014/main" id="{A1BB8427-CF39-2B4F-A702-0CBA2BC5A114}"/>
-              </a:ext>
-            </a:extLst>
-          </p:cNvPr>
-          <p:cNvPicPr>
-            <a:picLocks noChangeAspect="1" noChangeArrowheads="1"/>
-          </p:cNvPicPr>
-          <p:nvPr/>
-        </p:nvPicPr>
-        <p:blipFill rotWithShape="1">
-          <a:blip r:embed="rId3" cstate="email">
-            <a:extLst>
-              <a:ext uri="{28A0092B-C50C-407E-A947-70E740481C1C}">
-                <a14:useLocalDpi xmlns:a14="http://schemas.microsoft.com/office/drawing/2010/main"/>
-              </a:ext>
-            </a:extLst>
-          </a:blip>
-          <a:srcRect l="2337" t="5906" r="5348" b="10518"/>
-          <a:stretch/>
-        </p:blipFill>
-        <p:spPr bwMode="auto">
-          <a:xfrm>
-            <a:off x="6452919" y="4021776"/>
-            <a:ext cx="5628904" cy="2648197"/>
-          </a:xfrm>
-          <a:prstGeom prst="rect">
-            <a:avLst/>
-          </a:prstGeom>
-          <a:noFill/>
-          <a:extLst>
-            <a:ext uri="{909E8E84-426E-40DD-AFC4-6F175D3DCCD1}">
-              <a14:hiddenFill xmlns:a14="http://schemas.microsoft.com/office/drawing/2010/main">
-                <a:solidFill>
-                  <a:srgbClr val="FFFFFF"/>
-                </a:solidFill>
-              </a14:hiddenFill>
-            </a:ext>
-          </a:extLst>
-        </p:spPr>
-      </p:pic>
-      <p:graphicFrame>
-        <p:nvGraphicFramePr>
-          <p:cNvPr id="3" name="Table 2">
-            <a:extLst>
-              <a:ext uri="{FF2B5EF4-FFF2-40B4-BE49-F238E27FC236}">
-                <a16:creationId xmlns:a16="http://schemas.microsoft.com/office/drawing/2014/main" id="{7015C3BA-8A84-A346-A5DE-3BBD3A618057}"/>
-              </a:ext>
-            </a:extLst>
-          </p:cNvPr>
-          <p:cNvGraphicFramePr>
-            <a:graphicFrameLocks noGrp="1"/>
-          </p:cNvGraphicFramePr>
-          <p:nvPr>
-            <p:extLst>
-              <p:ext uri="{D42A27DB-BD31-4B8C-83A1-F6EECF244321}">
-                <p14:modId xmlns:p14="http://schemas.microsoft.com/office/powerpoint/2010/main" val="1539880265"/>
-              </p:ext>
-            </p:extLst>
-          </p:nvPr>
-        </p:nvGraphicFramePr>
-        <p:xfrm>
-          <a:off x="147244" y="1752682"/>
-          <a:ext cx="5511800" cy="3898900"/>
-        </p:xfrm>
-        <a:graphic>
-          <a:graphicData uri="http://schemas.openxmlformats.org/drawingml/2006/table">
-            <a:tbl>
-              <a:tblPr>
-                <a:tableStyleId>{5C22544A-7EE6-4342-B048-85BDC9FD1C3A}</a:tableStyleId>
-              </a:tblPr>
-              <a:tblGrid>
-                <a:gridCol w="1094744">
-                  <a:extLst>
-                    <a:ext uri="{9D8B030D-6E8A-4147-A177-3AD203B41FA5}">
-                      <a16:colId xmlns:a16="http://schemas.microsoft.com/office/drawing/2014/main" val="508734602"/>
-                    </a:ext>
-                  </a:extLst>
-                </a:gridCol>
-                <a:gridCol w="2322762">
-                  <a:extLst>
-                    <a:ext uri="{9D8B030D-6E8A-4147-A177-3AD203B41FA5}">
-                      <a16:colId xmlns:a16="http://schemas.microsoft.com/office/drawing/2014/main" val="1414177960"/>
-                    </a:ext>
-                  </a:extLst>
-                </a:gridCol>
-                <a:gridCol w="2094294">
-                  <a:extLst>
-                    <a:ext uri="{9D8B030D-6E8A-4147-A177-3AD203B41FA5}">
-                      <a16:colId xmlns:a16="http://schemas.microsoft.com/office/drawing/2014/main" val="598691665"/>
-                    </a:ext>
-                  </a:extLst>
-                </a:gridCol>
-              </a:tblGrid>
-              <a:tr h="241300">
-                <a:tc>
-                  <a:txBody>
-                    <a:bodyPr/>
-                    <a:lstStyle/>
-                    <a:p>
-                      <a:pPr algn="l" fontAlgn="ctr"/>
-                      <a:r>
-                        <a:rPr lang="en-US" sz="1400" u="none" strike="noStrike">
-                          <a:effectLst/>
-                        </a:rPr>
-                        <a:t>Parameters</a:t>
-                      </a:r>
-                      <a:endParaRPr lang="en-US" sz="1400" b="0" i="0" u="none" strike="noStrike">
-                        <a:solidFill>
-                          <a:srgbClr val="40424E"/>
-                        </a:solidFill>
-                        <a:effectLst/>
-                        <a:latin typeface="Arial" panose="020B0604020202020204" pitchFamily="34" charset="0"/>
-                      </a:endParaRPr>
-                    </a:p>
-                  </a:txBody>
-                  <a:tcPr marL="9525" marR="9525" marT="9525" marB="0" anchor="ctr"/>
-                </a:tc>
-                <a:tc>
-                  <a:txBody>
-                    <a:bodyPr/>
-                    <a:lstStyle/>
-                    <a:p>
-                      <a:pPr algn="l" fontAlgn="ctr"/>
-                      <a:r>
-                        <a:rPr lang="en-US" sz="1400" b="1" u="none" strike="noStrike" dirty="0">
-                          <a:solidFill>
-                            <a:srgbClr val="FF0000"/>
-                          </a:solidFill>
-                          <a:effectLst/>
-                        </a:rPr>
-                        <a:t>Kimball</a:t>
-                      </a:r>
-                      <a:endParaRPr lang="en-US" sz="1400" b="1" i="0" u="none" strike="noStrike" dirty="0">
-                        <a:solidFill>
-                          <a:srgbClr val="FF0000"/>
-                        </a:solidFill>
-                        <a:effectLst/>
-                        <a:latin typeface="Arial" panose="020B0604020202020204" pitchFamily="34" charset="0"/>
-                      </a:endParaRPr>
-                    </a:p>
-                  </a:txBody>
-                  <a:tcPr marL="9525" marR="9525" marT="9525" marB="0" anchor="ctr"/>
-                </a:tc>
-                <a:tc>
-                  <a:txBody>
-                    <a:bodyPr/>
-                    <a:lstStyle/>
-                    <a:p>
-                      <a:pPr algn="l" fontAlgn="ctr"/>
-                      <a:r>
-                        <a:rPr lang="en-US" sz="1400" b="1" u="none" strike="noStrike" dirty="0" err="1">
-                          <a:solidFill>
-                            <a:srgbClr val="FF0000"/>
-                          </a:solidFill>
-                          <a:effectLst/>
-                        </a:rPr>
-                        <a:t>Inmon</a:t>
-                      </a:r>
-                      <a:endParaRPr lang="en-US" sz="1400" b="1" i="0" u="none" strike="noStrike" dirty="0">
-                        <a:solidFill>
-                          <a:srgbClr val="FF0000"/>
-                        </a:solidFill>
-                        <a:effectLst/>
-                        <a:latin typeface="Arial" panose="020B0604020202020204" pitchFamily="34" charset="0"/>
-                      </a:endParaRPr>
-                    </a:p>
-                  </a:txBody>
-                  <a:tcPr marL="9525" marR="9525" marT="9525" marB="0" anchor="ctr"/>
-                </a:tc>
-                <a:extLst>
-                  <a:ext uri="{0D108BD9-81ED-4DB2-BD59-A6C34878D82A}">
-                    <a16:rowId xmlns:a16="http://schemas.microsoft.com/office/drawing/2014/main" val="1087883741"/>
-                  </a:ext>
-                </a:extLst>
-              </a:tr>
-              <a:tr h="228600">
-                <a:tc>
-                  <a:txBody>
-                    <a:bodyPr/>
-                    <a:lstStyle/>
-                    <a:p>
-                      <a:pPr algn="l" fontAlgn="ctr"/>
-                      <a:r>
-                        <a:rPr lang="en-US" sz="1250" u="none" strike="noStrike">
-                          <a:effectLst/>
-                        </a:rPr>
-                        <a:t>Introduced by</a:t>
-                      </a:r>
-                      <a:endParaRPr lang="en-US" sz="1250" b="0" i="0" u="none" strike="noStrike">
-                        <a:solidFill>
-                          <a:srgbClr val="40424E"/>
-                        </a:solidFill>
-                        <a:effectLst/>
-                        <a:latin typeface="Arial" panose="020B0604020202020204" pitchFamily="34" charset="0"/>
-                      </a:endParaRPr>
-                    </a:p>
-                  </a:txBody>
-                  <a:tcPr marL="9525" marR="9525" marT="9525" marB="0" anchor="ctr"/>
-                </a:tc>
-                <a:tc>
-                  <a:txBody>
-                    <a:bodyPr/>
-                    <a:lstStyle/>
-                    <a:p>
-                      <a:pPr algn="l" fontAlgn="ctr"/>
-                      <a:r>
-                        <a:rPr lang="en-US" sz="1250" u="none" strike="noStrike">
-                          <a:effectLst/>
-                        </a:rPr>
-                        <a:t>Introduced by Ralph Kimball.</a:t>
-                      </a:r>
-                      <a:endParaRPr lang="en-US" sz="1250" b="0" i="0" u="none" strike="noStrike">
-                        <a:solidFill>
-                          <a:srgbClr val="40424E"/>
-                        </a:solidFill>
-                        <a:effectLst/>
-                        <a:latin typeface="Arial" panose="020B0604020202020204" pitchFamily="34" charset="0"/>
-                      </a:endParaRPr>
-                    </a:p>
-                  </a:txBody>
-                  <a:tcPr marL="9525" marR="9525" marT="9525" marB="0" anchor="ctr"/>
-                </a:tc>
-                <a:tc>
-                  <a:txBody>
-                    <a:bodyPr/>
-                    <a:lstStyle/>
-                    <a:p>
-                      <a:pPr algn="l" fontAlgn="ctr"/>
-                      <a:r>
-                        <a:rPr lang="en-US" sz="1250" u="none" strike="noStrike">
-                          <a:effectLst/>
-                        </a:rPr>
-                        <a:t>Introduced by Bill Inmon.</a:t>
-                      </a:r>
-                      <a:endParaRPr lang="en-US" sz="1250" b="0" i="0" u="none" strike="noStrike">
-                        <a:solidFill>
-                          <a:srgbClr val="40424E"/>
-                        </a:solidFill>
-                        <a:effectLst/>
-                        <a:latin typeface="Arial" panose="020B0604020202020204" pitchFamily="34" charset="0"/>
-                      </a:endParaRPr>
-                    </a:p>
-                  </a:txBody>
-                  <a:tcPr marL="9525" marR="9525" marT="9525" marB="0" anchor="ctr"/>
-                </a:tc>
-                <a:extLst>
-                  <a:ext uri="{0D108BD9-81ED-4DB2-BD59-A6C34878D82A}">
-                    <a16:rowId xmlns:a16="http://schemas.microsoft.com/office/drawing/2014/main" val="2851270049"/>
-                  </a:ext>
-                </a:extLst>
-              </a:tr>
-              <a:tr h="457200">
-                <a:tc>
-                  <a:txBody>
-                    <a:bodyPr/>
-                    <a:lstStyle/>
-                    <a:p>
-                      <a:pPr algn="l" fontAlgn="ctr"/>
-                      <a:r>
-                        <a:rPr lang="en-US" sz="1250" u="none" strike="noStrike">
-                          <a:effectLst/>
-                        </a:rPr>
-                        <a:t>Approach</a:t>
-                      </a:r>
-                      <a:endParaRPr lang="en-US" sz="1250" b="0" i="0" u="none" strike="noStrike">
-                        <a:solidFill>
-                          <a:srgbClr val="40424E"/>
-                        </a:solidFill>
-                        <a:effectLst/>
-                        <a:latin typeface="Arial" panose="020B0604020202020204" pitchFamily="34" charset="0"/>
-                      </a:endParaRPr>
-                    </a:p>
-                  </a:txBody>
-                  <a:tcPr marL="9525" marR="9525" marT="9525" marB="0" anchor="ctr"/>
-                </a:tc>
-                <a:tc>
-                  <a:txBody>
-                    <a:bodyPr/>
-                    <a:lstStyle/>
-                    <a:p>
-                      <a:pPr algn="l" fontAlgn="ctr"/>
-                      <a:r>
-                        <a:rPr lang="en-US" sz="1250" u="none" strike="noStrike" dirty="0">
-                          <a:effectLst/>
-                        </a:rPr>
-                        <a:t>It has Bottom-Up Approach for implementation.</a:t>
-                      </a:r>
-                      <a:endParaRPr lang="en-US" sz="1250" b="0" i="0" u="none" strike="noStrike" dirty="0">
-                        <a:solidFill>
-                          <a:srgbClr val="40424E"/>
-                        </a:solidFill>
-                        <a:effectLst/>
-                        <a:latin typeface="Arial" panose="020B0604020202020204" pitchFamily="34" charset="0"/>
-                      </a:endParaRPr>
-                    </a:p>
-                  </a:txBody>
-                  <a:tcPr marL="9525" marR="9525" marT="9525" marB="0" anchor="ctr"/>
-                </a:tc>
-                <a:tc>
-                  <a:txBody>
-                    <a:bodyPr/>
-                    <a:lstStyle/>
-                    <a:p>
-                      <a:pPr algn="l" fontAlgn="ctr"/>
-                      <a:r>
-                        <a:rPr lang="en-US" sz="1250" u="none" strike="noStrike" dirty="0">
-                          <a:effectLst/>
-                        </a:rPr>
-                        <a:t>It has Top-Down Approach for implementation.</a:t>
-                      </a:r>
-                      <a:endParaRPr lang="en-US" sz="1250" b="0" i="0" u="none" strike="noStrike" dirty="0">
-                        <a:solidFill>
-                          <a:srgbClr val="40424E"/>
-                        </a:solidFill>
-                        <a:effectLst/>
-                        <a:latin typeface="Arial" panose="020B0604020202020204" pitchFamily="34" charset="0"/>
-                      </a:endParaRPr>
-                    </a:p>
-                  </a:txBody>
-                  <a:tcPr marL="9525" marR="9525" marT="9525" marB="0" anchor="ctr"/>
-                </a:tc>
-                <a:extLst>
-                  <a:ext uri="{0D108BD9-81ED-4DB2-BD59-A6C34878D82A}">
-                    <a16:rowId xmlns:a16="http://schemas.microsoft.com/office/drawing/2014/main" val="2897930628"/>
-                  </a:ext>
-                </a:extLst>
-              </a:tr>
-              <a:tr h="457200">
-                <a:tc>
-                  <a:txBody>
-                    <a:bodyPr/>
-                    <a:lstStyle/>
-                    <a:p>
-                      <a:pPr algn="l" fontAlgn="ctr"/>
-                      <a:r>
-                        <a:rPr lang="en-US" sz="1250" u="none" strike="noStrike">
-                          <a:effectLst/>
-                        </a:rPr>
-                        <a:t>Data Integration</a:t>
-                      </a:r>
-                      <a:endParaRPr lang="en-US" sz="1250" b="0" i="0" u="none" strike="noStrike">
-                        <a:solidFill>
-                          <a:srgbClr val="40424E"/>
-                        </a:solidFill>
-                        <a:effectLst/>
-                        <a:latin typeface="Arial" panose="020B0604020202020204" pitchFamily="34" charset="0"/>
-                      </a:endParaRPr>
-                    </a:p>
-                  </a:txBody>
-                  <a:tcPr marL="9525" marR="9525" marT="9525" marB="0" anchor="ctr"/>
-                </a:tc>
-                <a:tc>
-                  <a:txBody>
-                    <a:bodyPr/>
-                    <a:lstStyle/>
-                    <a:p>
-                      <a:pPr algn="l" fontAlgn="ctr"/>
-                      <a:r>
-                        <a:rPr lang="en-US" sz="1250" u="none" strike="noStrike" dirty="0">
-                          <a:effectLst/>
-                        </a:rPr>
-                        <a:t>It focuses Individual business areas.</a:t>
-                      </a:r>
-                      <a:endParaRPr lang="en-US" sz="1250" b="0" i="0" u="none" strike="noStrike" dirty="0">
-                        <a:solidFill>
-                          <a:srgbClr val="40424E"/>
-                        </a:solidFill>
-                        <a:effectLst/>
-                        <a:latin typeface="Arial" panose="020B0604020202020204" pitchFamily="34" charset="0"/>
-                      </a:endParaRPr>
-                    </a:p>
-                  </a:txBody>
-                  <a:tcPr marL="9525" marR="9525" marT="9525" marB="0" anchor="ctr"/>
-                </a:tc>
-                <a:tc>
-                  <a:txBody>
-                    <a:bodyPr/>
-                    <a:lstStyle/>
-                    <a:p>
-                      <a:pPr algn="l" fontAlgn="ctr"/>
-                      <a:r>
-                        <a:rPr lang="en-US" sz="1250" u="none" strike="noStrike" dirty="0">
-                          <a:effectLst/>
-                        </a:rPr>
-                        <a:t>It focuses Enterprise-wide areas.</a:t>
-                      </a:r>
-                      <a:endParaRPr lang="en-US" sz="1250" b="0" i="0" u="none" strike="noStrike" dirty="0">
-                        <a:solidFill>
-                          <a:srgbClr val="40424E"/>
-                        </a:solidFill>
-                        <a:effectLst/>
-                        <a:latin typeface="Arial" panose="020B0604020202020204" pitchFamily="34" charset="0"/>
-                      </a:endParaRPr>
-                    </a:p>
-                  </a:txBody>
-                  <a:tcPr marL="9525" marR="9525" marT="9525" marB="0" anchor="ctr"/>
-                </a:tc>
-                <a:extLst>
-                  <a:ext uri="{0D108BD9-81ED-4DB2-BD59-A6C34878D82A}">
-                    <a16:rowId xmlns:a16="http://schemas.microsoft.com/office/drawing/2014/main" val="919849523"/>
-                  </a:ext>
-                </a:extLst>
-              </a:tr>
-              <a:tr h="457200">
-                <a:tc>
-                  <a:txBody>
-                    <a:bodyPr/>
-                    <a:lstStyle/>
-                    <a:p>
-                      <a:pPr algn="l" fontAlgn="ctr"/>
-                      <a:r>
-                        <a:rPr lang="en-US" sz="1250" u="none" strike="noStrike">
-                          <a:effectLst/>
-                        </a:rPr>
-                        <a:t>Building Time</a:t>
-                      </a:r>
-                      <a:endParaRPr lang="en-US" sz="1250" b="0" i="0" u="none" strike="noStrike">
-                        <a:solidFill>
-                          <a:srgbClr val="40424E"/>
-                        </a:solidFill>
-                        <a:effectLst/>
-                        <a:latin typeface="Arial" panose="020B0604020202020204" pitchFamily="34" charset="0"/>
-                      </a:endParaRPr>
-                    </a:p>
-                  </a:txBody>
-                  <a:tcPr marL="9525" marR="9525" marT="9525" marB="0" anchor="ctr"/>
-                </a:tc>
-                <a:tc>
-                  <a:txBody>
-                    <a:bodyPr/>
-                    <a:lstStyle/>
-                    <a:p>
-                      <a:pPr algn="l" fontAlgn="ctr"/>
-                      <a:r>
-                        <a:rPr lang="en-US" sz="1250" u="none" strike="noStrike">
-                          <a:effectLst/>
-                        </a:rPr>
-                        <a:t>It is efficient and takes less time.</a:t>
-                      </a:r>
-                      <a:endParaRPr lang="en-US" sz="1250" b="0" i="0" u="none" strike="noStrike">
-                        <a:solidFill>
-                          <a:srgbClr val="40424E"/>
-                        </a:solidFill>
-                        <a:effectLst/>
-                        <a:latin typeface="Arial" panose="020B0604020202020204" pitchFamily="34" charset="0"/>
-                      </a:endParaRPr>
-                    </a:p>
-                  </a:txBody>
-                  <a:tcPr marL="9525" marR="9525" marT="9525" marB="0" anchor="ctr"/>
-                </a:tc>
-                <a:tc>
-                  <a:txBody>
-                    <a:bodyPr/>
-                    <a:lstStyle/>
-                    <a:p>
-                      <a:pPr algn="l" fontAlgn="ctr"/>
-                      <a:r>
-                        <a:rPr lang="en-US" sz="1250" u="none" strike="noStrike">
-                          <a:effectLst/>
-                        </a:rPr>
-                        <a:t>It is complex and consumes a lot of time.</a:t>
-                      </a:r>
-                      <a:endParaRPr lang="en-US" sz="1250" b="0" i="0" u="none" strike="noStrike">
-                        <a:solidFill>
-                          <a:srgbClr val="40424E"/>
-                        </a:solidFill>
-                        <a:effectLst/>
-                        <a:latin typeface="Arial" panose="020B0604020202020204" pitchFamily="34" charset="0"/>
-                      </a:endParaRPr>
-                    </a:p>
-                  </a:txBody>
-                  <a:tcPr marL="9525" marR="9525" marT="9525" marB="0" anchor="ctr"/>
-                </a:tc>
-                <a:extLst>
-                  <a:ext uri="{0D108BD9-81ED-4DB2-BD59-A6C34878D82A}">
-                    <a16:rowId xmlns:a16="http://schemas.microsoft.com/office/drawing/2014/main" val="476789648"/>
-                  </a:ext>
-                </a:extLst>
-              </a:tr>
-              <a:tr h="457200">
-                <a:tc>
-                  <a:txBody>
-                    <a:bodyPr/>
-                    <a:lstStyle/>
-                    <a:p>
-                      <a:pPr algn="l" fontAlgn="ctr"/>
-                      <a:r>
-                        <a:rPr lang="en-US" sz="1250" u="none" strike="noStrike">
-                          <a:effectLst/>
-                        </a:rPr>
-                        <a:t>Cost</a:t>
-                      </a:r>
-                      <a:endParaRPr lang="en-US" sz="1250" b="0" i="0" u="none" strike="noStrike">
-                        <a:solidFill>
-                          <a:srgbClr val="40424E"/>
-                        </a:solidFill>
-                        <a:effectLst/>
-                        <a:latin typeface="Arial" panose="020B0604020202020204" pitchFamily="34" charset="0"/>
-                      </a:endParaRPr>
-                    </a:p>
-                  </a:txBody>
-                  <a:tcPr marL="9525" marR="9525" marT="9525" marB="0" anchor="ctr"/>
-                </a:tc>
-                <a:tc>
-                  <a:txBody>
-                    <a:bodyPr/>
-                    <a:lstStyle/>
-                    <a:p>
-                      <a:pPr algn="l" fontAlgn="ctr"/>
-                      <a:r>
-                        <a:rPr lang="en-US" sz="1250" u="none" strike="noStrike">
-                          <a:effectLst/>
-                        </a:rPr>
-                        <a:t>It has iterative steps and is cost effective.</a:t>
-                      </a:r>
-                      <a:endParaRPr lang="en-US" sz="1250" b="0" i="0" u="none" strike="noStrike">
-                        <a:solidFill>
-                          <a:srgbClr val="40424E"/>
-                        </a:solidFill>
-                        <a:effectLst/>
-                        <a:latin typeface="Arial" panose="020B0604020202020204" pitchFamily="34" charset="0"/>
-                      </a:endParaRPr>
-                    </a:p>
-                  </a:txBody>
-                  <a:tcPr marL="9525" marR="9525" marT="9525" marB="0" anchor="ctr"/>
-                </a:tc>
-                <a:tc>
-                  <a:txBody>
-                    <a:bodyPr/>
-                    <a:lstStyle/>
-                    <a:p>
-                      <a:pPr algn="l" fontAlgn="ctr"/>
-                      <a:r>
-                        <a:rPr lang="en-US" sz="1250" u="none" strike="noStrike">
-                          <a:effectLst/>
-                        </a:rPr>
-                        <a:t>Initial cost is huge and development cost is low.</a:t>
-                      </a:r>
-                      <a:endParaRPr lang="en-US" sz="1250" b="0" i="0" u="none" strike="noStrike">
-                        <a:solidFill>
-                          <a:srgbClr val="40424E"/>
-                        </a:solidFill>
-                        <a:effectLst/>
-                        <a:latin typeface="Arial" panose="020B0604020202020204" pitchFamily="34" charset="0"/>
-                      </a:endParaRPr>
-                    </a:p>
-                  </a:txBody>
-                  <a:tcPr marL="9525" marR="9525" marT="9525" marB="0" anchor="ctr"/>
-                </a:tc>
-                <a:extLst>
-                  <a:ext uri="{0D108BD9-81ED-4DB2-BD59-A6C34878D82A}">
-                    <a16:rowId xmlns:a16="http://schemas.microsoft.com/office/drawing/2014/main" val="2096751881"/>
-                  </a:ext>
-                </a:extLst>
-              </a:tr>
-              <a:tr h="457200">
-                <a:tc>
-                  <a:txBody>
-                    <a:bodyPr/>
-                    <a:lstStyle/>
-                    <a:p>
-                      <a:pPr algn="l" fontAlgn="ctr"/>
-                      <a:r>
-                        <a:rPr lang="en-US" sz="1250" u="none" strike="noStrike">
-                          <a:effectLst/>
-                        </a:rPr>
-                        <a:t>Skills Required</a:t>
-                      </a:r>
-                      <a:endParaRPr lang="en-US" sz="1250" b="0" i="0" u="none" strike="noStrike">
-                        <a:solidFill>
-                          <a:srgbClr val="40424E"/>
-                        </a:solidFill>
-                        <a:effectLst/>
-                        <a:latin typeface="Arial" panose="020B0604020202020204" pitchFamily="34" charset="0"/>
-                      </a:endParaRPr>
-                    </a:p>
-                  </a:txBody>
-                  <a:tcPr marL="9525" marR="9525" marT="9525" marB="0" anchor="ctr"/>
-                </a:tc>
-                <a:tc>
-                  <a:txBody>
-                    <a:bodyPr/>
-                    <a:lstStyle/>
-                    <a:p>
-                      <a:pPr algn="l" fontAlgn="ctr"/>
-                      <a:r>
-                        <a:rPr lang="en-US" sz="1250" u="none" strike="noStrike">
-                          <a:effectLst/>
-                        </a:rPr>
-                        <a:t>It does not need such skills but a generic team will do job.</a:t>
-                      </a:r>
-                      <a:endParaRPr lang="en-US" sz="1250" b="0" i="0" u="none" strike="noStrike">
-                        <a:solidFill>
-                          <a:srgbClr val="40424E"/>
-                        </a:solidFill>
-                        <a:effectLst/>
-                        <a:latin typeface="Arial" panose="020B0604020202020204" pitchFamily="34" charset="0"/>
-                      </a:endParaRPr>
-                    </a:p>
-                  </a:txBody>
-                  <a:tcPr marL="9525" marR="9525" marT="9525" marB="0" anchor="ctr"/>
-                </a:tc>
-                <a:tc>
-                  <a:txBody>
-                    <a:bodyPr/>
-                    <a:lstStyle/>
-                    <a:p>
-                      <a:pPr algn="l" fontAlgn="ctr"/>
-                      <a:r>
-                        <a:rPr lang="en-US" sz="1250" u="none" strike="noStrike">
-                          <a:effectLst/>
-                        </a:rPr>
-                        <a:t>It needs specialized skills to make work.</a:t>
-                      </a:r>
-                      <a:endParaRPr lang="en-US" sz="1250" b="0" i="0" u="none" strike="noStrike">
-                        <a:solidFill>
-                          <a:srgbClr val="40424E"/>
-                        </a:solidFill>
-                        <a:effectLst/>
-                        <a:latin typeface="Arial" panose="020B0604020202020204" pitchFamily="34" charset="0"/>
-                      </a:endParaRPr>
-                    </a:p>
-                  </a:txBody>
-                  <a:tcPr marL="9525" marR="9525" marT="9525" marB="0" anchor="ctr"/>
-                </a:tc>
-                <a:extLst>
-                  <a:ext uri="{0D108BD9-81ED-4DB2-BD59-A6C34878D82A}">
-                    <a16:rowId xmlns:a16="http://schemas.microsoft.com/office/drawing/2014/main" val="2566804817"/>
-                  </a:ext>
-                </a:extLst>
-              </a:tr>
-              <a:tr h="228600">
-                <a:tc>
-                  <a:txBody>
-                    <a:bodyPr/>
-                    <a:lstStyle/>
-                    <a:p>
-                      <a:pPr algn="l" fontAlgn="ctr"/>
-                      <a:r>
-                        <a:rPr lang="en-US" sz="1250" u="none" strike="noStrike">
-                          <a:effectLst/>
-                        </a:rPr>
-                        <a:t>Maintenance</a:t>
-                      </a:r>
-                      <a:endParaRPr lang="en-US" sz="1250" b="0" i="0" u="none" strike="noStrike">
-                        <a:solidFill>
-                          <a:srgbClr val="40424E"/>
-                        </a:solidFill>
-                        <a:effectLst/>
-                        <a:latin typeface="Arial" panose="020B0604020202020204" pitchFamily="34" charset="0"/>
-                      </a:endParaRPr>
-                    </a:p>
-                  </a:txBody>
-                  <a:tcPr marL="9525" marR="9525" marT="9525" marB="0" anchor="ctr"/>
-                </a:tc>
-                <a:tc>
-                  <a:txBody>
-                    <a:bodyPr/>
-                    <a:lstStyle/>
-                    <a:p>
-                      <a:pPr algn="l" fontAlgn="ctr"/>
-                      <a:r>
-                        <a:rPr lang="en-US" sz="1250" u="none" strike="noStrike">
-                          <a:effectLst/>
-                        </a:rPr>
-                        <a:t>Here maintenance is difficult.</a:t>
-                      </a:r>
-                      <a:endParaRPr lang="en-US" sz="1250" b="0" i="0" u="none" strike="noStrike">
-                        <a:solidFill>
-                          <a:srgbClr val="40424E"/>
-                        </a:solidFill>
-                        <a:effectLst/>
-                        <a:latin typeface="Arial" panose="020B0604020202020204" pitchFamily="34" charset="0"/>
-                      </a:endParaRPr>
-                    </a:p>
-                  </a:txBody>
-                  <a:tcPr marL="9525" marR="9525" marT="9525" marB="0" anchor="ctr"/>
-                </a:tc>
-                <a:tc>
-                  <a:txBody>
-                    <a:bodyPr/>
-                    <a:lstStyle/>
-                    <a:p>
-                      <a:pPr algn="l" fontAlgn="ctr"/>
-                      <a:r>
-                        <a:rPr lang="en-US" sz="1250" u="none" strike="noStrike">
-                          <a:effectLst/>
-                        </a:rPr>
-                        <a:t>Here maintenance is easy.</a:t>
-                      </a:r>
-                      <a:endParaRPr lang="en-US" sz="1250" b="0" i="0" u="none" strike="noStrike">
-                        <a:solidFill>
-                          <a:srgbClr val="40424E"/>
-                        </a:solidFill>
-                        <a:effectLst/>
-                        <a:latin typeface="Arial" panose="020B0604020202020204" pitchFamily="34" charset="0"/>
-                      </a:endParaRPr>
-                    </a:p>
-                  </a:txBody>
-                  <a:tcPr marL="9525" marR="9525" marT="9525" marB="0" anchor="ctr"/>
-                </a:tc>
-                <a:extLst>
-                  <a:ext uri="{0D108BD9-81ED-4DB2-BD59-A6C34878D82A}">
-                    <a16:rowId xmlns:a16="http://schemas.microsoft.com/office/drawing/2014/main" val="1412522397"/>
-                  </a:ext>
-                </a:extLst>
-              </a:tr>
-              <a:tr h="457200">
-                <a:tc>
-                  <a:txBody>
-                    <a:bodyPr/>
-                    <a:lstStyle/>
-                    <a:p>
-                      <a:pPr algn="l" fontAlgn="ctr"/>
-                      <a:r>
-                        <a:rPr lang="en-US" sz="1250" u="none" strike="noStrike">
-                          <a:effectLst/>
-                        </a:rPr>
-                        <a:t>Data Model</a:t>
-                      </a:r>
-                      <a:endParaRPr lang="en-US" sz="1250" b="0" i="0" u="none" strike="noStrike">
-                        <a:solidFill>
-                          <a:srgbClr val="40424E"/>
-                        </a:solidFill>
-                        <a:effectLst/>
-                        <a:latin typeface="Arial" panose="020B0604020202020204" pitchFamily="34" charset="0"/>
-                      </a:endParaRPr>
-                    </a:p>
-                  </a:txBody>
-                  <a:tcPr marL="9525" marR="9525" marT="9525" marB="0" anchor="ctr"/>
-                </a:tc>
-                <a:tc>
-                  <a:txBody>
-                    <a:bodyPr/>
-                    <a:lstStyle/>
-                    <a:p>
-                      <a:pPr algn="l" fontAlgn="ctr"/>
-                      <a:r>
-                        <a:rPr lang="en-US" sz="1250" u="none" strike="noStrike">
-                          <a:effectLst/>
-                        </a:rPr>
-                        <a:t>It prefers data to be in De-normalized model.</a:t>
-                      </a:r>
-                      <a:endParaRPr lang="en-US" sz="1250" b="0" i="0" u="none" strike="noStrike">
-                        <a:solidFill>
-                          <a:srgbClr val="40424E"/>
-                        </a:solidFill>
-                        <a:effectLst/>
-                        <a:latin typeface="Arial" panose="020B0604020202020204" pitchFamily="34" charset="0"/>
-                      </a:endParaRPr>
-                    </a:p>
-                  </a:txBody>
-                  <a:tcPr marL="9525" marR="9525" marT="9525" marB="0" anchor="ctr"/>
-                </a:tc>
-                <a:tc>
-                  <a:txBody>
-                    <a:bodyPr/>
-                    <a:lstStyle/>
-                    <a:p>
-                      <a:pPr algn="l" fontAlgn="ctr"/>
-                      <a:r>
-                        <a:rPr lang="en-US" sz="1250" u="none" strike="noStrike">
-                          <a:effectLst/>
-                        </a:rPr>
-                        <a:t>It prefers data to be in normalized model.</a:t>
-                      </a:r>
-                      <a:endParaRPr lang="en-US" sz="1250" b="0" i="0" u="none" strike="noStrike">
-                        <a:solidFill>
-                          <a:srgbClr val="40424E"/>
-                        </a:solidFill>
-                        <a:effectLst/>
-                        <a:latin typeface="Arial" panose="020B0604020202020204" pitchFamily="34" charset="0"/>
-                      </a:endParaRPr>
-                    </a:p>
-                  </a:txBody>
-                  <a:tcPr marL="9525" marR="9525" marT="9525" marB="0" anchor="ctr"/>
-                </a:tc>
-                <a:extLst>
-                  <a:ext uri="{0D108BD9-81ED-4DB2-BD59-A6C34878D82A}">
-                    <a16:rowId xmlns:a16="http://schemas.microsoft.com/office/drawing/2014/main" val="68907120"/>
-                  </a:ext>
-                </a:extLst>
-              </a:tr>
-              <a:tr h="457200">
-                <a:tc>
-                  <a:txBody>
-                    <a:bodyPr/>
-                    <a:lstStyle/>
-                    <a:p>
-                      <a:pPr algn="l" fontAlgn="ctr"/>
-                      <a:r>
-                        <a:rPr lang="en-US" sz="1250" u="none" strike="noStrike">
-                          <a:effectLst/>
-                        </a:rPr>
-                        <a:t>Data Store Systems</a:t>
-                      </a:r>
-                      <a:endParaRPr lang="en-US" sz="1250" b="0" i="0" u="none" strike="noStrike">
-                        <a:solidFill>
-                          <a:srgbClr val="40424E"/>
-                        </a:solidFill>
-                        <a:effectLst/>
-                        <a:latin typeface="Arial" panose="020B0604020202020204" pitchFamily="34" charset="0"/>
-                      </a:endParaRPr>
-                    </a:p>
-                  </a:txBody>
-                  <a:tcPr marL="9525" marR="9525" marT="9525" marB="0" anchor="ctr"/>
-                </a:tc>
-                <a:tc>
-                  <a:txBody>
-                    <a:bodyPr/>
-                    <a:lstStyle/>
-                    <a:p>
-                      <a:pPr algn="l" fontAlgn="ctr"/>
-                      <a:r>
-                        <a:rPr lang="en-US" sz="1250" u="none" strike="noStrike">
-                          <a:effectLst/>
-                        </a:rPr>
-                        <a:t>In this, source systems are highly stable.</a:t>
-                      </a:r>
-                      <a:endParaRPr lang="en-US" sz="1250" b="0" i="0" u="none" strike="noStrike">
-                        <a:solidFill>
-                          <a:srgbClr val="40424E"/>
-                        </a:solidFill>
-                        <a:effectLst/>
-                        <a:latin typeface="Arial" panose="020B0604020202020204" pitchFamily="34" charset="0"/>
-                      </a:endParaRPr>
-                    </a:p>
-                  </a:txBody>
-                  <a:tcPr marL="9525" marR="9525" marT="9525" marB="0" anchor="ctr"/>
-                </a:tc>
-                <a:tc>
-                  <a:txBody>
-                    <a:bodyPr/>
-                    <a:lstStyle/>
-                    <a:p>
-                      <a:pPr algn="l" fontAlgn="ctr"/>
-                      <a:r>
-                        <a:rPr lang="en-US" sz="1250" u="none" strike="noStrike" dirty="0">
-                          <a:effectLst/>
-                        </a:rPr>
-                        <a:t>In this, source systems have high rate of change.</a:t>
-                      </a:r>
-                      <a:endParaRPr lang="en-US" sz="1250" b="0" i="0" u="none" strike="noStrike" dirty="0">
-                        <a:solidFill>
-                          <a:srgbClr val="40424E"/>
-                        </a:solidFill>
-                        <a:effectLst/>
-                        <a:latin typeface="Arial" panose="020B0604020202020204" pitchFamily="34" charset="0"/>
-                      </a:endParaRPr>
-                    </a:p>
-                  </a:txBody>
-                  <a:tcPr marL="9525" marR="9525" marT="9525" marB="0" anchor="ctr"/>
-                </a:tc>
-                <a:extLst>
-                  <a:ext uri="{0D108BD9-81ED-4DB2-BD59-A6C34878D82A}">
-                    <a16:rowId xmlns:a16="http://schemas.microsoft.com/office/drawing/2014/main" val="758233881"/>
-                  </a:ext>
-                </a:extLst>
-              </a:tr>
-            </a:tbl>
-          </a:graphicData>
-        </a:graphic>
-      </p:graphicFrame>
-      <p:sp>
-        <p:nvSpPr>
-          <p:cNvPr id="6" name="Rounded Rectangle 5">
-            <a:extLst>
-              <a:ext uri="{FF2B5EF4-FFF2-40B4-BE49-F238E27FC236}">
-                <a16:creationId xmlns:a16="http://schemas.microsoft.com/office/drawing/2014/main" id="{2AF877F6-E824-1449-B84B-E5353B0E439D}"/>
-              </a:ext>
-            </a:extLst>
-          </p:cNvPr>
-          <p:cNvSpPr/>
-          <p:nvPr/>
-        </p:nvSpPr>
-        <p:spPr>
-          <a:xfrm>
-            <a:off x="7533574" y="76402"/>
-            <a:ext cx="3396343" cy="6693853"/>
-          </a:xfrm>
-          <a:prstGeom prst="roundRect">
-            <a:avLst/>
-          </a:prstGeom>
-          <a:noFill/>
-          <a:ln w="63500">
-            <a:solidFill>
-              <a:srgbClr val="FF0000"/>
-            </a:solidFill>
-          </a:ln>
-        </p:spPr>
-        <p:style>
-          <a:lnRef idx="2">
-            <a:schemeClr val="accent1">
-              <a:shade val="50000"/>
-            </a:schemeClr>
-          </a:lnRef>
-          <a:fillRef idx="1">
-            <a:schemeClr val="accent1"/>
-          </a:fillRef>
-          <a:effectRef idx="0">
-            <a:schemeClr val="accent1"/>
-          </a:effectRef>
-          <a:fontRef idx="minor">
-            <a:schemeClr val="lt1"/>
-          </a:fontRef>
-        </p:style>
-        <p:txBody>
-          <a:bodyPr rtlCol="0" anchor="ctr"/>
-          <a:lstStyle/>
-          <a:p>
-            <a:pPr algn="ctr"/>
-            <a:endParaRPr lang="en-US"/>
-          </a:p>
-        </p:txBody>
-      </p:sp>
-      <p:sp>
-        <p:nvSpPr>
-          <p:cNvPr id="7" name="TextBox 6">
-            <a:extLst>
-              <a:ext uri="{FF2B5EF4-FFF2-40B4-BE49-F238E27FC236}">
-                <a16:creationId xmlns:a16="http://schemas.microsoft.com/office/drawing/2014/main" id="{E96509B1-63CD-E745-824F-781153CCDCE7}"/>
-              </a:ext>
-            </a:extLst>
-          </p:cNvPr>
-          <p:cNvSpPr txBox="1"/>
-          <p:nvPr/>
-        </p:nvSpPr>
-        <p:spPr>
-          <a:xfrm>
-            <a:off x="7975600" y="215900"/>
-            <a:ext cx="2489200" cy="369332"/>
-          </a:xfrm>
-          <a:prstGeom prst="rect">
-            <a:avLst/>
-          </a:prstGeom>
-          <a:noFill/>
-        </p:spPr>
-        <p:txBody>
-          <a:bodyPr wrap="square" rtlCol="0">
-            <a:spAutoFit/>
-          </a:bodyPr>
-          <a:lstStyle/>
-          <a:p>
-            <a:r>
-              <a:rPr lang="en-US" b="1" dirty="0">
-                <a:solidFill>
-                  <a:srgbClr val="FF0000"/>
-                </a:solidFill>
-              </a:rPr>
-              <a:t>This is no longer needed</a:t>
-            </a:r>
-          </a:p>
-        </p:txBody>
-      </p:sp>
-    </p:spTree>
-    <p:extLst>
-      <p:ext uri="{BB962C8B-B14F-4D97-AF65-F5344CB8AC3E}">
-        <p14:creationId xmlns:p14="http://schemas.microsoft.com/office/powerpoint/2010/main" val="1421258598"/>
       </p:ext>
     </p:extLst>
   </p:cSld>
